--- a/material/Python/12_클래스.pptx
+++ b/material/Python/12_클래스.pptx
@@ -1,6 +1,6 @@
 
 <file path=ppt/presentation.xml><?xml version="1.0" encoding="utf-8"?>
-<p:presentation xmlns:a="http://schemas.openxmlformats.org/drawingml/2006/main" xmlns:r="http://schemas.openxmlformats.org/officeDocument/2006/relationships" xmlns:p="http://schemas.openxmlformats.org/presentationml/2006/main" saveSubsetFonts="1">
+<p:presentation xmlns:a="http://schemas.openxmlformats.org/drawingml/2006/main" xmlns:r="http://schemas.openxmlformats.org/officeDocument/2006/relationships" xmlns:p="http://schemas.openxmlformats.org/presentationml/2006/main" embedTrueTypeFonts="1" saveSubsetFonts="1">
   <p:sldMasterIdLst>
     <p:sldMasterId id="2147483660" r:id="rId1"/>
   </p:sldMasterIdLst>
@@ -74,6 +74,42 @@
   </p:sldIdLst>
   <p:sldSz cx="12192000" cy="6858000"/>
   <p:notesSz cx="6858000" cy="9144000"/>
+  <p:embeddedFontLst>
+    <p:embeddedFont>
+      <p:font typeface="G마켓 산스 TTF Bold" panose="02000000000000000000" pitchFamily="2" charset="-127"/>
+      <p:bold r:id="rId66"/>
+    </p:embeddedFont>
+    <p:embeddedFont>
+      <p:font typeface="Pretendard Black" panose="02000A03000000020004" pitchFamily="2" charset="-127"/>
+      <p:bold r:id="rId67"/>
+    </p:embeddedFont>
+    <p:embeddedFont>
+      <p:font typeface="Pretendard ExtraLight" panose="02000303000000020004" pitchFamily="2" charset="-127"/>
+      <p:regular r:id="rId68"/>
+    </p:embeddedFont>
+    <p:embeddedFont>
+      <p:font typeface="Pretendard Light" panose="02000403000000020004" pitchFamily="2" charset="-127"/>
+      <p:regular r:id="rId69"/>
+    </p:embeddedFont>
+    <p:embeddedFont>
+      <p:font typeface="Pretendard Medium" panose="02000603000000020004" pitchFamily="2" charset="-127"/>
+      <p:regular r:id="rId70"/>
+    </p:embeddedFont>
+    <p:embeddedFont>
+      <p:font typeface="SimSun-ExtG" panose="02010609060101010101" pitchFamily="49" charset="-122"/>
+      <p:regular r:id="rId71"/>
+    </p:embeddedFont>
+    <p:embeddedFont>
+      <p:font typeface="맑은 고딕" panose="020B0503020000020004" pitchFamily="50" charset="-127"/>
+      <p:regular r:id="rId72"/>
+      <p:bold r:id="rId73"/>
+    </p:embeddedFont>
+    <p:embeddedFont>
+      <p:font typeface="메이플스토리" panose="02000300000000000000" pitchFamily="2" charset="-127"/>
+      <p:regular r:id="rId74"/>
+      <p:bold r:id="rId75"/>
+    </p:embeddedFont>
+  </p:embeddedFontLst>
   <p:defaultTextStyle>
     <a:defPPr>
       <a:defRPr lang="ko-KR"/>
@@ -280,7 +316,7 @@
             <a:fld id="{A13A867C-D490-40C2-AB8D-A60FA70A9BF5}" type="datetimeFigureOut">
               <a:rPr lang="ko-KR" altLang="en-US" smtClean="0"/>
               <a:pPr/>
-              <a:t>2025-07-25</a:t>
+              <a:t>2025-08-21</a:t>
             </a:fld>
             <a:endParaRPr lang="ko-KR" altLang="en-US" dirty="0"/>
           </a:p>
@@ -6569,7 +6605,7 @@
           <a:p>
             <a:fld id="{442BEE3F-2E9A-4FD8-8B8A-8619F3E161C0}" type="datetime1">
               <a:rPr lang="ko-KR" altLang="en-US" smtClean="0"/>
-              <a:t>2025-07-25</a:t>
+              <a:t>2025-08-21</a:t>
             </a:fld>
             <a:endParaRPr lang="ko-KR" altLang="en-US"/>
           </a:p>
@@ -6856,7 +6892,7 @@
           <a:p>
             <a:fld id="{0F78D9C4-20C1-4B15-A116-16DC77AD9A1E}" type="datetime1">
               <a:rPr lang="ko-KR" altLang="en-US" smtClean="0"/>
-              <a:t>2025-07-25</a:t>
+              <a:t>2025-08-21</a:t>
             </a:fld>
             <a:endParaRPr lang="ko-KR" altLang="en-US"/>
           </a:p>
@@ -7031,7 +7067,7 @@
           <a:p>
             <a:fld id="{7F5E23C3-0E3D-4E4E-8486-D7FB4C073DC1}" type="datetime1">
               <a:rPr lang="ko-KR" altLang="en-US" smtClean="0"/>
-              <a:t>2025-07-25</a:t>
+              <a:t>2025-08-21</a:t>
             </a:fld>
             <a:endParaRPr lang="ko-KR" altLang="en-US"/>
           </a:p>
@@ -7360,7 +7396,7 @@
           <a:p>
             <a:fld id="{7F5E23C3-0E3D-4E4E-8486-D7FB4C073DC1}" type="datetime1">
               <a:rPr lang="ko-KR" altLang="en-US" smtClean="0"/>
-              <a:t>2025-07-25</a:t>
+              <a:t>2025-08-21</a:t>
             </a:fld>
             <a:endParaRPr lang="ko-KR" altLang="en-US"/>
           </a:p>
@@ -8177,7 +8213,7 @@
           <a:p>
             <a:fld id="{0F78D9C4-20C1-4B15-A116-16DC77AD9A1E}" type="datetime1">
               <a:rPr lang="ko-KR" altLang="en-US" smtClean="0"/>
-              <a:t>2025-07-25</a:t>
+              <a:t>2025-08-21</a:t>
             </a:fld>
             <a:endParaRPr lang="ko-KR" altLang="en-US" dirty="0"/>
           </a:p>
@@ -8854,7 +8890,7 @@
           <a:p>
             <a:fld id="{0F78D9C4-20C1-4B15-A116-16DC77AD9A1E}" type="datetime1">
               <a:rPr lang="ko-KR" altLang="en-US" smtClean="0"/>
-              <a:t>2025-07-25</a:t>
+              <a:t>2025-08-21</a:t>
             </a:fld>
             <a:endParaRPr lang="ko-KR" altLang="en-US" dirty="0"/>
           </a:p>
@@ -9404,7 +9440,7 @@
           <a:p>
             <a:fld id="{76022175-F16A-4A96-8E45-178BE9345AE9}" type="datetime6">
               <a:rPr lang="ko-KR" altLang="en-US" smtClean="0"/>
-              <a:t>2025년 7월</a:t>
+              <a:t>2025년 8월</a:t>
             </a:fld>
             <a:endParaRPr lang="ko-KR" altLang="en-US"/>
           </a:p>
@@ -9806,7 +9842,7 @@
           <a:p>
             <a:fld id="{76022175-F16A-4A96-8E45-178BE9345AE9}" type="datetime6">
               <a:rPr lang="ko-KR" altLang="en-US" smtClean="0"/>
-              <a:t>2025년 7월</a:t>
+              <a:t>2025년 8월</a:t>
             </a:fld>
             <a:endParaRPr lang="ko-KR" altLang="en-US"/>
           </a:p>
@@ -10167,7 +10203,7 @@
           <a:p>
             <a:fld id="{0F78D9C4-20C1-4B15-A116-16DC77AD9A1E}" type="datetime1">
               <a:rPr lang="ko-KR" altLang="en-US" smtClean="0"/>
-              <a:t>2025-07-25</a:t>
+              <a:t>2025-08-21</a:t>
             </a:fld>
             <a:endParaRPr lang="ko-KR" altLang="en-US" dirty="0"/>
           </a:p>
@@ -10610,7 +10646,7 @@
           <a:p>
             <a:fld id="{0F78D9C4-20C1-4B15-A116-16DC77AD9A1E}" type="datetime1">
               <a:rPr lang="ko-KR" altLang="en-US" smtClean="0"/>
-              <a:t>2025-07-25</a:t>
+              <a:t>2025-08-21</a:t>
             </a:fld>
             <a:endParaRPr lang="ko-KR" altLang="en-US" dirty="0"/>
           </a:p>
@@ -10812,7 +10848,7 @@
           <a:p>
             <a:fld id="{0F78D9C4-20C1-4B15-A116-16DC77AD9A1E}" type="datetime1">
               <a:rPr lang="ko-KR" altLang="en-US" smtClean="0"/>
-              <a:t>2025-07-25</a:t>
+              <a:t>2025-08-21</a:t>
             </a:fld>
             <a:endParaRPr lang="ko-KR" altLang="en-US" dirty="0"/>
           </a:p>
@@ -11268,7 +11304,7 @@
           <a:p>
             <a:fld id="{0F78D9C4-20C1-4B15-A116-16DC77AD9A1E}" type="datetime1">
               <a:rPr lang="ko-KR" altLang="en-US" smtClean="0"/>
-              <a:t>2025-07-25</a:t>
+              <a:t>2025-08-21</a:t>
             </a:fld>
             <a:endParaRPr lang="ko-KR" altLang="en-US" dirty="0"/>
           </a:p>
@@ -11538,7 +11574,7 @@
           <a:p>
             <a:fld id="{0F78D9C4-20C1-4B15-A116-16DC77AD9A1E}" type="datetime1">
               <a:rPr lang="ko-KR" altLang="en-US" smtClean="0"/>
-              <a:t>2025-07-25</a:t>
+              <a:t>2025-08-21</a:t>
             </a:fld>
             <a:endParaRPr lang="ko-KR" altLang="en-US" dirty="0"/>
           </a:p>
@@ -12140,7 +12176,7 @@
           <a:p>
             <a:fld id="{0F78D9C4-20C1-4B15-A116-16DC77AD9A1E}" type="datetime1">
               <a:rPr lang="ko-KR" altLang="en-US" smtClean="0"/>
-              <a:t>2025-07-25</a:t>
+              <a:t>2025-08-21</a:t>
             </a:fld>
             <a:endParaRPr lang="ko-KR" altLang="en-US" dirty="0"/>
           </a:p>
@@ -12347,7 +12383,7 @@
           <a:p>
             <a:fld id="{0F78D9C4-20C1-4B15-A116-16DC77AD9A1E}" type="datetime1">
               <a:rPr lang="ko-KR" altLang="en-US" smtClean="0"/>
-              <a:t>2025-07-25</a:t>
+              <a:t>2025-08-21</a:t>
             </a:fld>
             <a:endParaRPr lang="ko-KR" altLang="en-US" dirty="0"/>
           </a:p>
@@ -13002,7 +13038,7 @@
           <a:p>
             <a:fld id="{0F78D9C4-20C1-4B15-A116-16DC77AD9A1E}" type="datetime1">
               <a:rPr lang="ko-KR" altLang="en-US" smtClean="0"/>
-              <a:t>2025-07-25</a:t>
+              <a:t>2025-08-21</a:t>
             </a:fld>
             <a:endParaRPr lang="ko-KR" altLang="en-US" dirty="0"/>
           </a:p>
@@ -13253,7 +13289,7 @@
           <a:p>
             <a:fld id="{0F78D9C4-20C1-4B15-A116-16DC77AD9A1E}" type="datetime1">
               <a:rPr lang="ko-KR" altLang="en-US" smtClean="0"/>
-              <a:t>2025-07-25</a:t>
+              <a:t>2025-08-21</a:t>
             </a:fld>
             <a:endParaRPr lang="ko-KR" altLang="en-US" dirty="0"/>
           </a:p>
@@ -13735,7 +13771,7 @@
           <a:p>
             <a:fld id="{0F78D9C4-20C1-4B15-A116-16DC77AD9A1E}" type="datetime1">
               <a:rPr lang="ko-KR" altLang="en-US" smtClean="0"/>
-              <a:t>2025-07-25</a:t>
+              <a:t>2025-08-21</a:t>
             </a:fld>
             <a:endParaRPr lang="ko-KR" altLang="en-US" dirty="0"/>
           </a:p>
@@ -13998,7 +14034,7 @@
           <a:p>
             <a:fld id="{0F78D9C4-20C1-4B15-A116-16DC77AD9A1E}" type="datetime1">
               <a:rPr lang="ko-KR" altLang="en-US" smtClean="0"/>
-              <a:t>2025-07-25</a:t>
+              <a:t>2025-08-21</a:t>
             </a:fld>
             <a:endParaRPr lang="ko-KR" altLang="en-US" dirty="0"/>
           </a:p>
@@ -15966,7 +16002,7 @@
           <a:p>
             <a:fld id="{76022175-F16A-4A96-8E45-178BE9345AE9}" type="datetime6">
               <a:rPr lang="ko-KR" altLang="en-US" smtClean="0"/>
-              <a:t>2025년 7월</a:t>
+              <a:t>2025년 8월</a:t>
             </a:fld>
             <a:endParaRPr lang="ko-KR" altLang="en-US"/>
           </a:p>
@@ -16265,7 +16301,7 @@
           <a:p>
             <a:fld id="{0F78D9C4-20C1-4B15-A116-16DC77AD9A1E}" type="datetime1">
               <a:rPr lang="ko-KR" altLang="en-US" smtClean="0"/>
-              <a:t>2025-07-25</a:t>
+              <a:t>2025-08-21</a:t>
             </a:fld>
             <a:endParaRPr lang="ko-KR" altLang="en-US" dirty="0"/>
           </a:p>
@@ -16756,7 +16792,7 @@
           <a:p>
             <a:fld id="{0F78D9C4-20C1-4B15-A116-16DC77AD9A1E}" type="datetime1">
               <a:rPr lang="ko-KR" altLang="en-US" smtClean="0"/>
-              <a:t>2025-07-25</a:t>
+              <a:t>2025-08-21</a:t>
             </a:fld>
             <a:endParaRPr lang="ko-KR" altLang="en-US" dirty="0"/>
           </a:p>
@@ -17900,7 +17936,7 @@
           <a:p>
             <a:fld id="{0F78D9C4-20C1-4B15-A116-16DC77AD9A1E}" type="datetime1">
               <a:rPr lang="ko-KR" altLang="en-US" smtClean="0"/>
-              <a:t>2025-07-25</a:t>
+              <a:t>2025-08-21</a:t>
             </a:fld>
             <a:endParaRPr lang="ko-KR" altLang="en-US" dirty="0"/>
           </a:p>
@@ -18371,7 +18407,7 @@
           <a:p>
             <a:fld id="{0F78D9C4-20C1-4B15-A116-16DC77AD9A1E}" type="datetime1">
               <a:rPr lang="ko-KR" altLang="en-US" smtClean="0"/>
-              <a:t>2025-07-25</a:t>
+              <a:t>2025-08-21</a:t>
             </a:fld>
             <a:endParaRPr lang="ko-KR" altLang="en-US" dirty="0"/>
           </a:p>
@@ -18765,7 +18801,7 @@
           <a:p>
             <a:fld id="{0F78D9C4-20C1-4B15-A116-16DC77AD9A1E}" type="datetime1">
               <a:rPr lang="ko-KR" altLang="en-US" smtClean="0"/>
-              <a:t>2025-07-25</a:t>
+              <a:t>2025-08-21</a:t>
             </a:fld>
             <a:endParaRPr lang="ko-KR" altLang="en-US" dirty="0"/>
           </a:p>
@@ -19312,7 +19348,7 @@
           <a:p>
             <a:fld id="{0F78D9C4-20C1-4B15-A116-16DC77AD9A1E}" type="datetime1">
               <a:rPr lang="ko-KR" altLang="en-US" smtClean="0"/>
-              <a:t>2025-07-25</a:t>
+              <a:t>2025-08-21</a:t>
             </a:fld>
             <a:endParaRPr lang="ko-KR" altLang="en-US" dirty="0"/>
           </a:p>
@@ -19580,7 +19616,7 @@
           <a:p>
             <a:fld id="{0F78D9C4-20C1-4B15-A116-16DC77AD9A1E}" type="datetime1">
               <a:rPr lang="ko-KR" altLang="en-US" smtClean="0"/>
-              <a:t>2025-07-25</a:t>
+              <a:t>2025-08-21</a:t>
             </a:fld>
             <a:endParaRPr lang="ko-KR" altLang="en-US" dirty="0"/>
           </a:p>
@@ -20030,7 +20066,7 @@
           <a:p>
             <a:fld id="{0F78D9C4-20C1-4B15-A116-16DC77AD9A1E}" type="datetime1">
               <a:rPr lang="ko-KR" altLang="en-US" smtClean="0"/>
-              <a:t>2025-07-25</a:t>
+              <a:t>2025-08-21</a:t>
             </a:fld>
             <a:endParaRPr lang="ko-KR" altLang="en-US" dirty="0"/>
           </a:p>
@@ -20307,7 +20343,7 @@
           <a:p>
             <a:fld id="{0F78D9C4-20C1-4B15-A116-16DC77AD9A1E}" type="datetime1">
               <a:rPr lang="ko-KR" altLang="en-US" smtClean="0"/>
-              <a:t>2025-07-25</a:t>
+              <a:t>2025-08-21</a:t>
             </a:fld>
             <a:endParaRPr lang="ko-KR" altLang="en-US" dirty="0"/>
           </a:p>
@@ -20741,7 +20777,7 @@
           <a:p>
             <a:fld id="{0F78D9C4-20C1-4B15-A116-16DC77AD9A1E}" type="datetime1">
               <a:rPr lang="ko-KR" altLang="en-US" smtClean="0"/>
-              <a:t>2025-07-25</a:t>
+              <a:t>2025-08-21</a:t>
             </a:fld>
             <a:endParaRPr lang="ko-KR" altLang="en-US" dirty="0"/>
           </a:p>
@@ -21144,7 +21180,7 @@
           <a:p>
             <a:fld id="{0F78D9C4-20C1-4B15-A116-16DC77AD9A1E}" type="datetime1">
               <a:rPr lang="ko-KR" altLang="en-US" smtClean="0"/>
-              <a:t>2025-07-25</a:t>
+              <a:t>2025-08-21</a:t>
             </a:fld>
             <a:endParaRPr lang="ko-KR" altLang="en-US" dirty="0"/>
           </a:p>
@@ -21602,7 +21638,7 @@
           <a:p>
             <a:fld id="{0F78D9C4-20C1-4B15-A116-16DC77AD9A1E}" type="datetime1">
               <a:rPr lang="ko-KR" altLang="en-US" smtClean="0"/>
-              <a:t>2025-07-25</a:t>
+              <a:t>2025-08-21</a:t>
             </a:fld>
             <a:endParaRPr lang="ko-KR" altLang="en-US" dirty="0"/>
           </a:p>
@@ -21954,7 +21990,7 @@
           <a:p>
             <a:fld id="{0F78D9C4-20C1-4B15-A116-16DC77AD9A1E}" type="datetime1">
               <a:rPr lang="ko-KR" altLang="en-US" smtClean="0"/>
-              <a:t>2025-07-25</a:t>
+              <a:t>2025-08-21</a:t>
             </a:fld>
             <a:endParaRPr lang="ko-KR" altLang="en-US" dirty="0"/>
           </a:p>
@@ -22215,7 +22251,7 @@
           <a:p>
             <a:fld id="{0F78D9C4-20C1-4B15-A116-16DC77AD9A1E}" type="datetime1">
               <a:rPr lang="ko-KR" altLang="en-US" smtClean="0"/>
-              <a:t>2025-07-25</a:t>
+              <a:t>2025-08-21</a:t>
             </a:fld>
             <a:endParaRPr lang="ko-KR" altLang="en-US" dirty="0"/>
           </a:p>
@@ -22916,7 +22952,7 @@
           <a:p>
             <a:fld id="{76022175-F16A-4A96-8E45-178BE9345AE9}" type="datetime6">
               <a:rPr lang="ko-KR" altLang="en-US" smtClean="0"/>
-              <a:t>2025년 7월</a:t>
+              <a:t>2025년 8월</a:t>
             </a:fld>
             <a:endParaRPr lang="ko-KR" altLang="en-US"/>
           </a:p>
@@ -23465,7 +23501,7 @@
           <a:p>
             <a:fld id="{76022175-F16A-4A96-8E45-178BE9345AE9}" type="datetime6">
               <a:rPr lang="ko-KR" altLang="en-US" smtClean="0"/>
-              <a:t>2025년 7월</a:t>
+              <a:t>2025년 8월</a:t>
             </a:fld>
             <a:endParaRPr lang="ko-KR" altLang="en-US"/>
           </a:p>
@@ -23766,7 +23802,7 @@
           <a:p>
             <a:fld id="{0F78D9C4-20C1-4B15-A116-16DC77AD9A1E}" type="datetime1">
               <a:rPr lang="ko-KR" altLang="en-US" smtClean="0"/>
-              <a:t>2025-07-25</a:t>
+              <a:t>2025-08-21</a:t>
             </a:fld>
             <a:endParaRPr lang="ko-KR" altLang="en-US" dirty="0"/>
           </a:p>
@@ -24898,7 +24934,7 @@
           <a:p>
             <a:fld id="{0F78D9C4-20C1-4B15-A116-16DC77AD9A1E}" type="datetime1">
               <a:rPr lang="ko-KR" altLang="en-US" smtClean="0"/>
-              <a:t>2025-07-25</a:t>
+              <a:t>2025-08-21</a:t>
             </a:fld>
             <a:endParaRPr lang="ko-KR" altLang="en-US" dirty="0"/>
           </a:p>
@@ -25440,7 +25476,7 @@
           <a:p>
             <a:fld id="{0F78D9C4-20C1-4B15-A116-16DC77AD9A1E}" type="datetime1">
               <a:rPr lang="ko-KR" altLang="en-US" smtClean="0"/>
-              <a:t>2025-07-25</a:t>
+              <a:t>2025-08-21</a:t>
             </a:fld>
             <a:endParaRPr lang="ko-KR" altLang="en-US" dirty="0"/>
           </a:p>
@@ -25740,7 +25776,7 @@
           <a:p>
             <a:fld id="{0F78D9C4-20C1-4B15-A116-16DC77AD9A1E}" type="datetime1">
               <a:rPr lang="ko-KR" altLang="en-US" smtClean="0"/>
-              <a:t>2025-07-25</a:t>
+              <a:t>2025-08-21</a:t>
             </a:fld>
             <a:endParaRPr lang="ko-KR" altLang="en-US" dirty="0"/>
           </a:p>
@@ -26155,7 +26191,7 @@
           <a:p>
             <a:fld id="{0F78D9C4-20C1-4B15-A116-16DC77AD9A1E}" type="datetime1">
               <a:rPr lang="ko-KR" altLang="en-US" smtClean="0"/>
-              <a:t>2025-07-25</a:t>
+              <a:t>2025-08-21</a:t>
             </a:fld>
             <a:endParaRPr lang="ko-KR" altLang="en-US" dirty="0"/>
           </a:p>
@@ -26479,7 +26515,7 @@
           <a:p>
             <a:fld id="{0F78D9C4-20C1-4B15-A116-16DC77AD9A1E}" type="datetime1">
               <a:rPr lang="ko-KR" altLang="en-US" smtClean="0"/>
-              <a:t>2025-07-25</a:t>
+              <a:t>2025-08-21</a:t>
             </a:fld>
             <a:endParaRPr lang="ko-KR" altLang="en-US" dirty="0"/>
           </a:p>
@@ -26743,7 +26779,7 @@
           <a:p>
             <a:fld id="{0F78D9C4-20C1-4B15-A116-16DC77AD9A1E}" type="datetime1">
               <a:rPr lang="ko-KR" altLang="en-US" smtClean="0"/>
-              <a:t>2025-07-25</a:t>
+              <a:t>2025-08-21</a:t>
             </a:fld>
             <a:endParaRPr lang="ko-KR" altLang="en-US" dirty="0"/>
           </a:p>
@@ -27192,7 +27228,7 @@
           <a:p>
             <a:fld id="{0F78D9C4-20C1-4B15-A116-16DC77AD9A1E}" type="datetime1">
               <a:rPr lang="ko-KR" altLang="en-US" smtClean="0"/>
-              <a:t>2025-07-25</a:t>
+              <a:t>2025-08-21</a:t>
             </a:fld>
             <a:endParaRPr lang="ko-KR" altLang="en-US" dirty="0"/>
           </a:p>
@@ -27568,7 +27604,7 @@
           <a:p>
             <a:fld id="{0F78D9C4-20C1-4B15-A116-16DC77AD9A1E}" type="datetime1">
               <a:rPr lang="ko-KR" altLang="en-US" smtClean="0"/>
-              <a:t>2025-07-25</a:t>
+              <a:t>2025-08-21</a:t>
             </a:fld>
             <a:endParaRPr lang="ko-KR" altLang="en-US" dirty="0"/>
           </a:p>
@@ -28331,7 +28367,7 @@
           <a:p>
             <a:fld id="{76022175-F16A-4A96-8E45-178BE9345AE9}" type="datetime6">
               <a:rPr lang="ko-KR" altLang="en-US" smtClean="0"/>
-              <a:t>2025년 7월</a:t>
+              <a:t>2025년 8월</a:t>
             </a:fld>
             <a:endParaRPr lang="ko-KR" altLang="en-US"/>
           </a:p>
@@ -28892,7 +28928,7 @@
           <a:p>
             <a:fld id="{76022175-F16A-4A96-8E45-178BE9345AE9}" type="datetime6">
               <a:rPr lang="ko-KR" altLang="en-US" smtClean="0"/>
-              <a:t>2025년 7월</a:t>
+              <a:t>2025년 8월</a:t>
             </a:fld>
             <a:endParaRPr lang="ko-KR" altLang="en-US"/>
           </a:p>
@@ -29268,7 +29304,7 @@
           <a:p>
             <a:fld id="{76022175-F16A-4A96-8E45-178BE9345AE9}" type="datetime6">
               <a:rPr lang="ko-KR" altLang="en-US" smtClean="0"/>
-              <a:t>2025년 7월</a:t>
+              <a:t>2025년 8월</a:t>
             </a:fld>
             <a:endParaRPr lang="ko-KR" altLang="en-US"/>
           </a:p>
@@ -29567,7 +29603,7 @@
           <a:p>
             <a:fld id="{0F78D9C4-20C1-4B15-A116-16DC77AD9A1E}" type="datetime1">
               <a:rPr lang="ko-KR" altLang="en-US" smtClean="0"/>
-              <a:t>2025-07-25</a:t>
+              <a:t>2025-08-21</a:t>
             </a:fld>
             <a:endParaRPr lang="ko-KR" altLang="en-US" dirty="0"/>
           </a:p>
@@ -30048,7 +30084,7 @@
           <a:p>
             <a:fld id="{0F78D9C4-20C1-4B15-A116-16DC77AD9A1E}" type="datetime1">
               <a:rPr lang="ko-KR" altLang="en-US" smtClean="0"/>
-              <a:t>2025-07-25</a:t>
+              <a:t>2025-08-21</a:t>
             </a:fld>
             <a:endParaRPr lang="ko-KR" altLang="en-US" dirty="0"/>
           </a:p>
@@ -30588,7 +30624,7 @@
           <a:p>
             <a:fld id="{0F78D9C4-20C1-4B15-A116-16DC77AD9A1E}" type="datetime1">
               <a:rPr lang="ko-KR" altLang="en-US" smtClean="0"/>
-              <a:t>2025-07-25</a:t>
+              <a:t>2025-08-21</a:t>
             </a:fld>
             <a:endParaRPr lang="ko-KR" altLang="en-US" dirty="0"/>
           </a:p>
@@ -30963,7 +30999,7 @@
           <a:p>
             <a:fld id="{0F78D9C4-20C1-4B15-A116-16DC77AD9A1E}" type="datetime1">
               <a:rPr lang="ko-KR" altLang="en-US" smtClean="0"/>
-              <a:t>2025-07-25</a:t>
+              <a:t>2025-08-21</a:t>
             </a:fld>
             <a:endParaRPr lang="ko-KR" altLang="en-US" dirty="0"/>
           </a:p>
@@ -31691,7 +31727,7 @@
           <a:p>
             <a:fld id="{0F78D9C4-20C1-4B15-A116-16DC77AD9A1E}" type="datetime1">
               <a:rPr lang="ko-KR" altLang="en-US" smtClean="0"/>
-              <a:t>2025-07-25</a:t>
+              <a:t>2025-08-21</a:t>
             </a:fld>
             <a:endParaRPr lang="ko-KR" altLang="en-US" dirty="0"/>
           </a:p>
@@ -32523,7 +32559,7 @@
           <a:p>
             <a:fld id="{76022175-F16A-4A96-8E45-178BE9345AE9}" type="datetime6">
               <a:rPr lang="ko-KR" altLang="en-US" smtClean="0"/>
-              <a:t>2025년 7월</a:t>
+              <a:t>2025년 8월</a:t>
             </a:fld>
             <a:endParaRPr lang="ko-KR" altLang="en-US"/>
           </a:p>
@@ -32859,7 +32895,7 @@
           <a:p>
             <a:fld id="{0F78D9C4-20C1-4B15-A116-16DC77AD9A1E}" type="datetime1">
               <a:rPr lang="ko-KR" altLang="en-US" smtClean="0"/>
-              <a:t>2025-07-25</a:t>
+              <a:t>2025-08-21</a:t>
             </a:fld>
             <a:endParaRPr lang="ko-KR" altLang="en-US" dirty="0"/>
           </a:p>
@@ -33517,7 +33553,7 @@
           <a:p>
             <a:fld id="{0F78D9C4-20C1-4B15-A116-16DC77AD9A1E}" type="datetime1">
               <a:rPr lang="ko-KR" altLang="en-US" smtClean="0"/>
-              <a:t>2025-07-25</a:t>
+              <a:t>2025-08-21</a:t>
             </a:fld>
             <a:endParaRPr lang="ko-KR" altLang="en-US" dirty="0"/>
           </a:p>
